--- a/pptx-asset-library/decks/01_tables/TBL_bulk_underline_v1.pptx
+++ b/pptx-asset-library/decks/01_tables/TBL_bulk_underline_v1.pptx
@@ -3189,7 +3189,7 @@
           <a:graphicData uri="http://schemas.openxmlformats.org/drawingml/2006/table">
             <a:tbl>
               <a:tblPr>
-                <a:tableStyleId>{2D5ABB26-0587-4C30-8999-92F81FD0307C}</a:tableStyleId>
+                <a:tableStyleId>{5C22544A-7EE6-4342-B048-85BDC9FD1C3A}</a:tableStyleId>
               </a:tblPr>
               <a:tblGrid>
                 <a:gridCol w="2377440"/>
@@ -3940,7 +3940,7 @@
           <a:graphicData uri="http://schemas.openxmlformats.org/drawingml/2006/table">
             <a:tbl>
               <a:tblPr>
-                <a:tableStyleId>{2D5ABB26-0587-4C30-8999-92F81FD0307C}</a:tableStyleId>
+                <a:tableStyleId>{5C22544A-7EE6-4342-B048-85BDC9FD1C3A}</a:tableStyleId>
               </a:tblPr>
               <a:tblGrid>
                 <a:gridCol w="2377440"/>
@@ -4810,7 +4810,7 @@
           <a:graphicData uri="http://schemas.openxmlformats.org/drawingml/2006/table">
             <a:tbl>
               <a:tblPr>
-                <a:tableStyleId>{2D5ABB26-0587-4C30-8999-92F81FD0307C}</a:tableStyleId>
+                <a:tableStyleId>{5C22544A-7EE6-4342-B048-85BDC9FD1C3A}</a:tableStyleId>
               </a:tblPr>
               <a:tblGrid>
                 <a:gridCol w="2377440"/>
@@ -5915,7 +5915,7 @@
           <a:graphicData uri="http://schemas.openxmlformats.org/drawingml/2006/table">
             <a:tbl>
               <a:tblPr>
-                <a:tableStyleId>{2D5ABB26-0587-4C30-8999-92F81FD0307C}</a:tableStyleId>
+                <a:tableStyleId>{5C22544A-7EE6-4342-B048-85BDC9FD1C3A}</a:tableStyleId>
               </a:tblPr>
               <a:tblGrid>
                 <a:gridCol w="2011680"/>
@@ -7255,7 +7255,7 @@
           <a:graphicData uri="http://schemas.openxmlformats.org/drawingml/2006/table">
             <a:tbl>
               <a:tblPr>
-                <a:tableStyleId>{2D5ABB26-0587-4C30-8999-92F81FD0307C}</a:tableStyleId>
+                <a:tableStyleId>{5C22544A-7EE6-4342-B048-85BDC9FD1C3A}</a:tableStyleId>
               </a:tblPr>
               <a:tblGrid>
                 <a:gridCol w="2377440"/>
@@ -8202,7 +8202,7 @@
           <a:graphicData uri="http://schemas.openxmlformats.org/drawingml/2006/table">
             <a:tbl>
               <a:tblPr>
-                <a:tableStyleId>{2D5ABB26-0587-4C30-8999-92F81FD0307C}</a:tableStyleId>
+                <a:tableStyleId>{5C22544A-7EE6-4342-B048-85BDC9FD1C3A}</a:tableStyleId>
               </a:tblPr>
               <a:tblGrid>
                 <a:gridCol w="2011680"/>
@@ -9345,7 +9345,7 @@
           <a:graphicData uri="http://schemas.openxmlformats.org/drawingml/2006/table">
             <a:tbl>
               <a:tblPr>
-                <a:tableStyleId>{2D5ABB26-0587-4C30-8999-92F81FD0307C}</a:tableStyleId>
+                <a:tableStyleId>{5C22544A-7EE6-4342-B048-85BDC9FD1C3A}</a:tableStyleId>
               </a:tblPr>
               <a:tblGrid>
                 <a:gridCol w="2377440"/>
@@ -10215,7 +10215,7 @@
           <a:graphicData uri="http://schemas.openxmlformats.org/drawingml/2006/table">
             <a:tbl>
               <a:tblPr>
-                <a:tableStyleId>{2D5ABB26-0587-4C30-8999-92F81FD0307C}</a:tableStyleId>
+                <a:tableStyleId>{5C22544A-7EE6-4342-B048-85BDC9FD1C3A}</a:tableStyleId>
               </a:tblPr>
               <a:tblGrid>
                 <a:gridCol w="2377440"/>
@@ -11320,7 +11320,7 @@
           <a:graphicData uri="http://schemas.openxmlformats.org/drawingml/2006/table">
             <a:tbl>
               <a:tblPr>
-                <a:tableStyleId>{2D5ABB26-0587-4C30-8999-92F81FD0307C}</a:tableStyleId>
+                <a:tableStyleId>{5C22544A-7EE6-4342-B048-85BDC9FD1C3A}</a:tableStyleId>
               </a:tblPr>
               <a:tblGrid>
                 <a:gridCol w="2011680"/>
@@ -12660,7 +12660,7 @@
           <a:graphicData uri="http://schemas.openxmlformats.org/drawingml/2006/table">
             <a:tbl>
               <a:tblPr>
-                <a:tableStyleId>{2D5ABB26-0587-4C30-8999-92F81FD0307C}</a:tableStyleId>
+                <a:tableStyleId>{5C22544A-7EE6-4342-B048-85BDC9FD1C3A}</a:tableStyleId>
               </a:tblPr>
               <a:tblGrid>
                 <a:gridCol w="2377440"/>
@@ -13411,7 +13411,7 @@
           <a:graphicData uri="http://schemas.openxmlformats.org/drawingml/2006/table">
             <a:tbl>
               <a:tblPr>
-                <a:tableStyleId>{2D5ABB26-0587-4C30-8999-92F81FD0307C}</a:tableStyleId>
+                <a:tableStyleId>{5C22544A-7EE6-4342-B048-85BDC9FD1C3A}</a:tableStyleId>
               </a:tblPr>
               <a:tblGrid>
                 <a:gridCol w="2377440"/>
@@ -14358,7 +14358,7 @@
           <a:graphicData uri="http://schemas.openxmlformats.org/drawingml/2006/table">
             <a:tbl>
               <a:tblPr>
-                <a:tableStyleId>{2D5ABB26-0587-4C30-8999-92F81FD0307C}</a:tableStyleId>
+                <a:tableStyleId>{5C22544A-7EE6-4342-B048-85BDC9FD1C3A}</a:tableStyleId>
               </a:tblPr>
               <a:tblGrid>
                 <a:gridCol w="2011680"/>
